--- a/topic04/talk-3/ReactJS_01.pptx
+++ b/topic04/talk-3/ReactJS_01.pptx
@@ -6243,7 +6243,7 @@
           </p:cNvPicPr>
           <p:nvPr/>
         </p:nvPicPr>
-        <p:blipFill>
+        <p:blipFill rotWithShape="1">
           <a:blip r:embed="rId2">
             <a:extLst>
               <a:ext uri="{28A0092B-C50C-407E-A947-70E740481C1C}">
@@ -6251,15 +6251,15 @@
               </a:ext>
             </a:extLst>
           </a:blip>
-          <a:srcRect/>
+          <a:srcRect l="22772"/>
           <a:stretch>
             <a:fillRect/>
           </a:stretch>
         </p:blipFill>
         <p:spPr bwMode="auto">
           <a:xfrm>
-            <a:off x="2298700" y="2819401"/>
-            <a:ext cx="7835900" cy="3763963"/>
+            <a:off x="3962400" y="2819399"/>
+            <a:ext cx="6051550" cy="3763963"/>
           </a:xfrm>
           <a:prstGeom prst="rect">
             <a:avLst/>
@@ -6933,70 +6933,10 @@
       </p:grpSpPr>
       <p:pic>
         <p:nvPicPr>
-          <p:cNvPr id="40964" name="Picture 5">
+          <p:cNvPr id="4" name="Picture 3" descr="A screenshot of a computer program&#10;&#10;AI-generated content may be incorrect.">
             <a:extLst>
               <a:ext uri="{FF2B5EF4-FFF2-40B4-BE49-F238E27FC236}">
-                <a16:creationId xmlns:a16="http://schemas.microsoft.com/office/drawing/2014/main" id="{00806A90-146A-AD18-869E-46277DA81E90}"/>
-              </a:ext>
-            </a:extLst>
-          </p:cNvPr>
-          <p:cNvPicPr>
-            <a:picLocks noChangeAspect="1" noChangeArrowheads="1"/>
-          </p:cNvPicPr>
-          <p:nvPr/>
-        </p:nvPicPr>
-        <p:blipFill>
-          <a:blip r:embed="rId3">
-            <a:extLst>
-              <a:ext uri="{28A0092B-C50C-407E-A947-70E740481C1C}">
-                <a14:useLocalDpi xmlns:a14="http://schemas.microsoft.com/office/drawing/2010/main" val="0"/>
-              </a:ext>
-            </a:extLst>
-          </a:blip>
-          <a:srcRect/>
-          <a:stretch>
-            <a:fillRect/>
-          </a:stretch>
-        </p:blipFill>
-        <p:spPr bwMode="auto">
-          <a:xfrm>
-            <a:off x="5410200" y="1417638"/>
-            <a:ext cx="3213100" cy="4983162"/>
-          </a:xfrm>
-          <a:prstGeom prst="rect">
-            <a:avLst/>
-          </a:prstGeom>
-          <a:noFill/>
-          <a:ln>
-            <a:noFill/>
-          </a:ln>
-          <a:extLst>
-            <a:ext uri="{909E8E84-426E-40DD-AFC4-6F175D3DCCD1}">
-              <a14:hiddenFill xmlns:a14="http://schemas.microsoft.com/office/drawing/2010/main">
-                <a:solidFill>
-                  <a:srgbClr val="FFFFFF"/>
-                </a:solidFill>
-              </a14:hiddenFill>
-            </a:ext>
-            <a:ext uri="{91240B29-F687-4F45-9708-019B960494DF}">
-              <a14:hiddenLine xmlns:a14="http://schemas.microsoft.com/office/drawing/2010/main" w="9525">
-                <a:solidFill>
-                  <a:srgbClr val="000000"/>
-                </a:solidFill>
-                <a:miter lim="800000"/>
-                <a:headEnd/>
-                <a:tailEnd/>
-              </a14:hiddenLine>
-            </a:ext>
-          </a:extLst>
-        </p:spPr>
-      </p:pic>
-      <p:pic>
-        <p:nvPicPr>
-          <p:cNvPr id="6" name="Picture 5">
-            <a:extLst>
-              <a:ext uri="{FF2B5EF4-FFF2-40B4-BE49-F238E27FC236}">
-                <a16:creationId xmlns:a16="http://schemas.microsoft.com/office/drawing/2014/main" id="{BD514249-E3C7-745C-EC8C-5F08F8BF257D}"/>
+                <a16:creationId xmlns:a16="http://schemas.microsoft.com/office/drawing/2014/main" id="{F02F6331-B38C-7919-E547-ADAA42EC6363}"/>
               </a:ext>
             </a:extLst>
           </p:cNvPr>
@@ -7006,15 +6946,15 @@
           <p:nvPr/>
         </p:nvPicPr>
         <p:blipFill>
-          <a:blip r:embed="rId4"/>
+          <a:blip r:embed="rId3"/>
           <a:stretch>
             <a:fillRect/>
           </a:stretch>
         </p:blipFill>
         <p:spPr>
           <a:xfrm>
-            <a:off x="5331376" y="1356263"/>
-            <a:ext cx="3545377" cy="5165724"/>
+            <a:off x="2895600" y="1958941"/>
+            <a:ext cx="3894568" cy="3435383"/>
           </a:xfrm>
           <a:prstGeom prst="rect">
             <a:avLst/>
@@ -7268,175 +7208,6 @@
       </p:sp>
       <p:sp>
         <p:nvSpPr>
-          <p:cNvPr id="13" name="Rounded Rectangular Callout 12">
-            <a:extLst>
-              <a:ext uri="{FF2B5EF4-FFF2-40B4-BE49-F238E27FC236}">
-                <a16:creationId xmlns:a16="http://schemas.microsoft.com/office/drawing/2014/main" id="{13BB3700-6898-33EC-7278-826D075BA22F}"/>
-              </a:ext>
-            </a:extLst>
-          </p:cNvPr>
-          <p:cNvSpPr>
-            <a:spLocks noChangeArrowheads="1"/>
-          </p:cNvSpPr>
-          <p:nvPr/>
-        </p:nvSpPr>
-        <p:spPr bwMode="auto">
-          <a:xfrm>
-            <a:off x="8343900" y="1728789"/>
-            <a:ext cx="1600200" cy="682625"/>
-          </a:xfrm>
-          <a:prstGeom prst="wedgeRoundRectCallout">
-            <a:avLst>
-              <a:gd name="adj1" fmla="val -117316"/>
-              <a:gd name="adj2" fmla="val -52730"/>
-              <a:gd name="adj3" fmla="val 16667"/>
-            </a:avLst>
-          </a:prstGeom>
-          <a:solidFill>
-            <a:srgbClr val="0000FF"/>
-          </a:solidFill>
-          <a:ln w="9525">
-            <a:solidFill>
-              <a:srgbClr val="B6DCDF"/>
-            </a:solidFill>
-            <a:miter lim="800000"/>
-            <a:headEnd/>
-            <a:tailEnd/>
-          </a:ln>
-          <a:effectLst>
-            <a:outerShdw blurRad="40000" dist="23000" dir="5400000" rotWithShape="0">
-              <a:srgbClr val="808080">
-                <a:alpha val="34999"/>
-              </a:srgbClr>
-            </a:outerShdw>
-          </a:effectLst>
-        </p:spPr>
-        <p:txBody>
-          <a:bodyPr/>
-          <a:lstStyle>
-            <a:lvl1pPr eaLnBrk="0" hangingPunct="0">
-              <a:defRPr sz="2400">
-                <a:solidFill>
-                  <a:schemeClr val="tx1"/>
-                </a:solidFill>
-                <a:latin typeface="Arial" charset="0"/>
-                <a:ea typeface="ＭＳ Ｐゴシック" charset="-128"/>
-              </a:defRPr>
-            </a:lvl1pPr>
-            <a:lvl2pPr marL="742950" indent="-285750" eaLnBrk="0" hangingPunct="0">
-              <a:defRPr sz="2400">
-                <a:solidFill>
-                  <a:schemeClr val="tx1"/>
-                </a:solidFill>
-                <a:latin typeface="Arial" charset="0"/>
-                <a:ea typeface="ＭＳ Ｐゴシック" charset="-128"/>
-              </a:defRPr>
-            </a:lvl2pPr>
-            <a:lvl3pPr marL="1143000" indent="-228600" eaLnBrk="0" hangingPunct="0">
-              <a:defRPr sz="2400">
-                <a:solidFill>
-                  <a:schemeClr val="tx1"/>
-                </a:solidFill>
-                <a:latin typeface="Arial" charset="0"/>
-                <a:ea typeface="ＭＳ Ｐゴシック" charset="-128"/>
-              </a:defRPr>
-            </a:lvl3pPr>
-            <a:lvl4pPr marL="1600200" indent="-228600" eaLnBrk="0" hangingPunct="0">
-              <a:defRPr sz="2400">
-                <a:solidFill>
-                  <a:schemeClr val="tx1"/>
-                </a:solidFill>
-                <a:latin typeface="Arial" charset="0"/>
-                <a:ea typeface="ＭＳ Ｐゴシック" charset="-128"/>
-              </a:defRPr>
-            </a:lvl4pPr>
-            <a:lvl5pPr marL="2057400" indent="-228600" eaLnBrk="0" hangingPunct="0">
-              <a:defRPr sz="2400">
-                <a:solidFill>
-                  <a:schemeClr val="tx1"/>
-                </a:solidFill>
-                <a:latin typeface="Arial" charset="0"/>
-                <a:ea typeface="ＭＳ Ｐゴシック" charset="-128"/>
-              </a:defRPr>
-            </a:lvl5pPr>
-            <a:lvl6pPr marL="2514600" indent="-228600" eaLnBrk="0" fontAlgn="base" hangingPunct="0">
-              <a:spcBef>
-                <a:spcPct val="0"/>
-              </a:spcBef>
-              <a:spcAft>
-                <a:spcPct val="0"/>
-              </a:spcAft>
-              <a:defRPr sz="2400">
-                <a:solidFill>
-                  <a:schemeClr val="tx1"/>
-                </a:solidFill>
-                <a:latin typeface="Arial" charset="0"/>
-                <a:ea typeface="ＭＳ Ｐゴシック" charset="-128"/>
-              </a:defRPr>
-            </a:lvl6pPr>
-            <a:lvl7pPr marL="2971800" indent="-228600" eaLnBrk="0" fontAlgn="base" hangingPunct="0">
-              <a:spcBef>
-                <a:spcPct val="0"/>
-              </a:spcBef>
-              <a:spcAft>
-                <a:spcPct val="0"/>
-              </a:spcAft>
-              <a:defRPr sz="2400">
-                <a:solidFill>
-                  <a:schemeClr val="tx1"/>
-                </a:solidFill>
-                <a:latin typeface="Arial" charset="0"/>
-                <a:ea typeface="ＭＳ Ｐゴシック" charset="-128"/>
-              </a:defRPr>
-            </a:lvl7pPr>
-            <a:lvl8pPr marL="3429000" indent="-228600" eaLnBrk="0" fontAlgn="base" hangingPunct="0">
-              <a:spcBef>
-                <a:spcPct val="0"/>
-              </a:spcBef>
-              <a:spcAft>
-                <a:spcPct val="0"/>
-              </a:spcAft>
-              <a:defRPr sz="2400">
-                <a:solidFill>
-                  <a:schemeClr val="tx1"/>
-                </a:solidFill>
-                <a:latin typeface="Arial" charset="0"/>
-                <a:ea typeface="ＭＳ Ｐゴシック" charset="-128"/>
-              </a:defRPr>
-            </a:lvl8pPr>
-            <a:lvl9pPr marL="3886200" indent="-228600" eaLnBrk="0" fontAlgn="base" hangingPunct="0">
-              <a:spcBef>
-                <a:spcPct val="0"/>
-              </a:spcBef>
-              <a:spcAft>
-                <a:spcPct val="0"/>
-              </a:spcAft>
-              <a:defRPr sz="2400">
-                <a:solidFill>
-                  <a:schemeClr val="tx1"/>
-                </a:solidFill>
-                <a:latin typeface="Arial" charset="0"/>
-                <a:ea typeface="ＭＳ Ｐゴシック" charset="-128"/>
-              </a:defRPr>
-            </a:lvl9pPr>
-          </a:lstStyle>
-          <a:p>
-            <a:pPr eaLnBrk="1" hangingPunct="1">
-              <a:defRPr/>
-            </a:pPr>
-            <a:r>
-              <a:rPr lang="en-US" altLang="en-US" sz="1600" dirty="0">
-                <a:solidFill>
-                  <a:srgbClr val="FFFFFF"/>
-                </a:solidFill>
-              </a:rPr>
-              <a:t>Configuration – boilerplate</a:t>
-            </a:r>
-          </a:p>
-        </p:txBody>
-      </p:sp>
-      <p:sp>
-        <p:nvSpPr>
           <p:cNvPr id="11" name="Rounded Rectangular Callout 10">
             <a:extLst>
               <a:ext uri="{FF2B5EF4-FFF2-40B4-BE49-F238E27FC236}">
@@ -7451,7 +7222,7 @@
         </p:nvSpPr>
         <p:spPr bwMode="auto">
           <a:xfrm>
-            <a:off x="8602663" y="3325814"/>
+            <a:off x="6119479" y="3572248"/>
             <a:ext cx="1600200" cy="682625"/>
           </a:xfrm>
           <a:prstGeom prst="wedgeRoundRectCallout">
@@ -7633,13 +7404,13 @@
         </p:nvSpPr>
         <p:spPr bwMode="auto">
           <a:xfrm>
-            <a:off x="8742363" y="4422776"/>
-            <a:ext cx="990600" cy="396875"/>
+            <a:off x="6096000" y="4626161"/>
+            <a:ext cx="2209800" cy="1014597"/>
           </a:xfrm>
           <a:prstGeom prst="wedgeRoundRectCallout">
             <a:avLst>
-              <a:gd name="adj1" fmla="val -248485"/>
-              <a:gd name="adj2" fmla="val 75563"/>
+              <a:gd name="adj1" fmla="val -136870"/>
+              <a:gd name="adj2" fmla="val 3226"/>
               <a:gd name="adj3" fmla="val 16667"/>
             </a:avLst>
           </a:prstGeom>
@@ -7677,7 +7448,7 @@
                 <a:latin typeface="+mn-lt"/>
                 <a:ea typeface="+mn-ea"/>
               </a:rPr>
-              <a:t>Stories</a:t>
+              <a:t>Typescript Types and Interfaces</a:t>
             </a:r>
           </a:p>
         </p:txBody>
@@ -7698,7 +7469,7 @@
         </p:nvSpPr>
         <p:spPr bwMode="auto">
           <a:xfrm>
-            <a:off x="8437563" y="2554288"/>
+            <a:off x="5990068" y="2882902"/>
             <a:ext cx="1600200" cy="442912"/>
           </a:xfrm>
           <a:prstGeom prst="wedgeRoundRectCallout">
@@ -7847,36 +7618,6 @@
           </a:p>
         </p:txBody>
       </p:sp>
-      <p:pic>
-        <p:nvPicPr>
-          <p:cNvPr id="3" name="Picture 2">
-            <a:extLst>
-              <a:ext uri="{FF2B5EF4-FFF2-40B4-BE49-F238E27FC236}">
-                <a16:creationId xmlns:a16="http://schemas.microsoft.com/office/drawing/2014/main" id="{D0BA57F6-CD9F-4F8B-FC99-BF4637E5D0E9}"/>
-              </a:ext>
-            </a:extLst>
-          </p:cNvPr>
-          <p:cNvPicPr>
-            <a:picLocks noChangeAspect="1"/>
-          </p:cNvPicPr>
-          <p:nvPr/>
-        </p:nvPicPr>
-        <p:blipFill>
-          <a:blip r:embed="rId5"/>
-          <a:stretch>
-            <a:fillRect/>
-          </a:stretch>
-        </p:blipFill>
-        <p:spPr>
-          <a:xfrm>
-            <a:off x="2154237" y="1305284"/>
-            <a:ext cx="2804206" cy="5303837"/>
-          </a:xfrm>
-          <a:prstGeom prst="rect">
-            <a:avLst/>
-          </a:prstGeom>
-        </p:spPr>
-      </p:pic>
     </p:spTree>
   </p:cSld>
   <p:clrMapOvr>
@@ -8281,10 +8022,10 @@
       </p:sp>
       <p:pic>
         <p:nvPicPr>
-          <p:cNvPr id="3" name="Picture 2">
+          <p:cNvPr id="4" name="Picture 3" descr="A screen shot of a computer program&#10;&#10;AI-generated content may be incorrect.">
             <a:extLst>
               <a:ext uri="{FF2B5EF4-FFF2-40B4-BE49-F238E27FC236}">
-                <a16:creationId xmlns:a16="http://schemas.microsoft.com/office/drawing/2014/main" id="{0884B258-1592-5A5E-DCB0-C660E8D40787}"/>
+                <a16:creationId xmlns:a16="http://schemas.microsoft.com/office/drawing/2014/main" id="{5882E7E5-1F5E-9BA1-E607-EE2F7839E193}"/>
               </a:ext>
             </a:extLst>
           </p:cNvPr>
@@ -8301,8 +8042,8 @@
         </p:blipFill>
         <p:spPr>
           <a:xfrm>
-            <a:off x="2971800" y="2528968"/>
-            <a:ext cx="5257800" cy="4034002"/>
+            <a:off x="2971800" y="2587739"/>
+            <a:ext cx="5765800" cy="3797832"/>
           </a:xfrm>
           <a:prstGeom prst="rect">
             <a:avLst/>
@@ -8515,39 +8256,7 @@
                 <a:ea typeface="ＭＳ Ｐゴシック" panose="020B0600070205080204" pitchFamily="34" charset="-128"/>
                 <a:cs typeface="Courier New" panose="02070309020205020404" pitchFamily="49" charset="0"/>
               </a:rPr>
-              <a:t> </a:t>
-            </a:r>
-            <a:r>
-              <a:rPr lang="en-GB" sz="1600" b="0" dirty="0" err="1">
-                <a:latin typeface="Courier New" panose="02070309020205020404" pitchFamily="49" charset="0"/>
-                <a:ea typeface="ＭＳ Ｐゴシック" panose="020B0600070205080204" pitchFamily="34" charset="-128"/>
-                <a:cs typeface="Courier New" panose="02070309020205020404" pitchFamily="49" charset="0"/>
-              </a:rPr>
-              <a:t>React.FC</a:t>
-            </a:r>
-            <a:r>
-              <a:rPr lang="en-GB" sz="1600" b="0" dirty="0">
-                <a:latin typeface="Courier New" panose="02070309020205020404" pitchFamily="49" charset="0"/>
-                <a:ea typeface="ＭＳ Ｐゴシック" panose="020B0600070205080204" pitchFamily="34" charset="-128"/>
-                <a:cs typeface="Courier New" panose="02070309020205020404" pitchFamily="49" charset="0"/>
-              </a:rPr>
-              <a:t>&lt;</a:t>
-            </a:r>
-            <a:r>
-              <a:rPr lang="en-GB" sz="1600" b="0" dirty="0" err="1">
-                <a:latin typeface="Courier New" panose="02070309020205020404" pitchFamily="49" charset="0"/>
-                <a:ea typeface="ＭＳ Ｐゴシック" panose="020B0600070205080204" pitchFamily="34" charset="-128"/>
-                <a:cs typeface="Courier New" panose="02070309020205020404" pitchFamily="49" charset="0"/>
-              </a:rPr>
-              <a:t>PropInterface</a:t>
-            </a:r>
-            <a:r>
-              <a:rPr lang="en-GB" sz="1600" b="0" dirty="0">
-                <a:latin typeface="Courier New" panose="02070309020205020404" pitchFamily="49" charset="0"/>
-                <a:ea typeface="ＭＳ Ｐゴシック" panose="020B0600070205080204" pitchFamily="34" charset="-128"/>
-                <a:cs typeface="Courier New" panose="02070309020205020404" pitchFamily="49" charset="0"/>
-              </a:rPr>
-              <a:t>&gt; = (props) =&gt; {</a:t>
+              <a:t> = (props: PropInterface) =&gt; {</a:t>
             </a:r>
           </a:p>
           <a:p>
@@ -9912,6 +9621,36 @@
           <a:chExt cx="0" cy="0"/>
         </a:xfrm>
       </p:grpSpPr>
+      <p:pic>
+        <p:nvPicPr>
+          <p:cNvPr id="10" name="Picture 9" descr="A screen shot of a computer program&#10;&#10;AI-generated content may be incorrect.">
+            <a:extLst>
+              <a:ext uri="{FF2B5EF4-FFF2-40B4-BE49-F238E27FC236}">
+                <a16:creationId xmlns:a16="http://schemas.microsoft.com/office/drawing/2014/main" id="{31C614C4-6CAF-03B4-25D1-68A0FD6AE64C}"/>
+              </a:ext>
+            </a:extLst>
+          </p:cNvPr>
+          <p:cNvPicPr>
+            <a:picLocks noChangeAspect="1"/>
+          </p:cNvPicPr>
+          <p:nvPr/>
+        </p:nvPicPr>
+        <p:blipFill>
+          <a:blip r:embed="rId3"/>
+          <a:stretch>
+            <a:fillRect/>
+          </a:stretch>
+        </p:blipFill>
+        <p:spPr>
+          <a:xfrm>
+            <a:off x="1697657" y="2898462"/>
+            <a:ext cx="3906787" cy="2661275"/>
+          </a:xfrm>
+          <a:prstGeom prst="rect">
+            <a:avLst/>
+          </a:prstGeom>
+        </p:spPr>
+      </p:pic>
       <p:sp>
         <p:nvSpPr>
           <p:cNvPr id="45057" name="Title 1">
@@ -10227,7 +9966,7 @@
           <p:nvPr/>
         </p:nvPicPr>
         <p:blipFill>
-          <a:blip r:embed="rId3">
+          <a:blip r:embed="rId4">
             <a:extLst>
               <a:ext uri="{28A0092B-C50C-407E-A947-70E740481C1C}">
                 <a14:useLocalDpi xmlns:a14="http://schemas.microsoft.com/office/drawing/2010/main" val="0"/>
@@ -10431,36 +10170,6 @@
           </a:p>
         </p:txBody>
       </p:sp>
-      <p:pic>
-        <p:nvPicPr>
-          <p:cNvPr id="4" name="Picture 3">
-            <a:extLst>
-              <a:ext uri="{FF2B5EF4-FFF2-40B4-BE49-F238E27FC236}">
-                <a16:creationId xmlns:a16="http://schemas.microsoft.com/office/drawing/2014/main" id="{4382C3E0-D4C7-FAB1-114A-867FAAA82010}"/>
-              </a:ext>
-            </a:extLst>
-          </p:cNvPr>
-          <p:cNvPicPr>
-            <a:picLocks noChangeAspect="1"/>
-          </p:cNvPicPr>
-          <p:nvPr/>
-        </p:nvPicPr>
-        <p:blipFill>
-          <a:blip r:embed="rId4"/>
-          <a:stretch>
-            <a:fillRect/>
-          </a:stretch>
-        </p:blipFill>
-        <p:spPr>
-          <a:xfrm>
-            <a:off x="1584356" y="2853439"/>
-            <a:ext cx="4166357" cy="2944895"/>
-          </a:xfrm>
-          <a:prstGeom prst="rect">
-            <a:avLst/>
-          </a:prstGeom>
-        </p:spPr>
-      </p:pic>
       <p:sp>
         <p:nvSpPr>
           <p:cNvPr id="6" name="Rounded Rectangle 1">
